--- a/decks/englit-inspector/englit-inspector_ch3_sheila-and-gerald.pptx
+++ b/decks/englit-inspector/englit-inspector_ch3_sheila-and-gerald.pptx
@@ -129,30 +129,30 @@
   <p:extLst>
     <p:ext uri="{521415D9-36F7-43E2-AB2F-B90AF26B5E84}">
       <p14:sectionLst xmlns:p14="http://schemas.microsoft.com/office/powerpoint/2010/main">
-        <p14:section name="Opening" id="{0eec9fc1-d5b2-1202-0584-1d2552617712}">
+        <p14:section name="Opening" id="{aefd9287-f053-ee1e-daab-452c86026906}">
           <p14:sldIdLst>
             <p14:sldId id="256"/>
           </p14:sldIdLst>
         </p14:section>
-        <p14:section name="Gate" id="{80334cab-5163-3004-969c-4fa6444f0696}">
+        <p14:section name="Gate" id="{8b6633b4-1448-eb5e-319b-1b1bbde69616}">
           <p14:sldIdLst>
             <p14:sldId id="257"/>
             <p14:sldId id="258"/>
           </p14:sldIdLst>
         </p14:section>
-        <p14:section name="Pre-teach" id="{7281a10a-3fef-90e3-b246-3f362c2af341}">
+        <p14:section name="Pre-teach" id="{195038dc-a463-8695-5849-abec6766ba77}">
           <p14:sldIdLst>
             <p14:sldId id="259"/>
             <p14:sldId id="260"/>
           </p14:sldIdLst>
         </p14:section>
-        <p14:section name="Read-along" id="{e5ceaf07-b230-28b8-be6c-d65a11c07117}">
+        <p14:section name="Read-along" id="{a0acaecf-918d-bb20-2560-a8c18909bf5d}">
           <p14:sldIdLst>
             <p14:sldId id="261"/>
             <p14:sldId id="262"/>
           </p14:sldIdLst>
         </p14:section>
-        <p14:section name="Teach" id="{85ff6290-3704-1bba-4860-bd6b98b10027}">
+        <p14:section name="Teach" id="{63617362-26d9-8cef-1568-841ac63ba6d0}">
           <p14:sldIdLst>
             <p14:sldId id="263"/>
             <p14:sldId id="264"/>
@@ -160,7 +160,7 @@
             <p14:sldId id="266"/>
           </p14:sldIdLst>
         </p14:section>
-        <p14:section name="Routes" id="{0290d436-f841-3d19-dbbf-e14b41de6a02}">
+        <p14:section name="Routes" id="{d0d26796-5373-972c-40b8-180c686dd237}">
           <p14:sldIdLst>
             <p14:sldId id="267"/>
             <p14:sldId id="268"/>
@@ -171,12 +171,12 @@
             <p14:sldId id="273"/>
           </p14:sldIdLst>
         </p14:section>
-        <p14:section name="Close" id="{018b3b30-13a8-2fce-9d86-6bde8a84ff31}">
+        <p14:section name="Close" id="{6e980a77-c3c0-0337-668f-bd9c05374dd5}">
           <p14:sldIdLst>
             <p14:sldId id="274"/>
           </p14:sldIdLst>
         </p14:section>
-        <p14:section name="Answers" id="{48b7acf9-74da-525b-628c-bcb73e4678fd}">
+        <p14:section name="Answers" id="{6a13c5e5-e441-e826-5941-84c7ee417dbb}">
           <p14:sldIdLst>
             <p14:sldId id="275"/>
             <p14:sldId id="276"/>
@@ -10818,7 +10818,7 @@
                 <a:ea typeface="Calibri" pitchFamily="34" charset="-122"/>
                 <a:cs typeface="Calibri" pitchFamily="34" charset="-120"/>
               </a:rPr>
-              <a:t>Eva had been rude to Mrs Birling</a:t>
+              <a:t>Eva had asked the shop for more pay</a:t>
             </a:r>
             <a:endParaRPr lang="en-US" sz="2400" dirty="0"/>
           </a:p>
@@ -10855,7 +10855,7 @@
                 <a:ea typeface="Calibri" pitchFamily="34" charset="-122"/>
                 <a:cs typeface="Calibri" pitchFamily="34" charset="-120"/>
               </a:rPr>
-              <a:t>Eva had asked the shop for more pay</a:t>
+              <a:t>Eva had been rude to Mrs Birling</a:t>
             </a:r>
             <a:endParaRPr lang="en-US" sz="2400" dirty="0"/>
           </a:p>
@@ -11446,7 +11446,7 @@
                 <a:ea typeface="Calibri" pitchFamily="34" charset="-122"/>
                 <a:cs typeface="Calibri" pitchFamily="34" charset="-120"/>
               </a:rPr>
-              <a:t>Eva had been rude to Mrs Birling</a:t>
+              <a:t>Eva had asked the shop for more pay</a:t>
             </a:r>
             <a:endParaRPr lang="en-US" sz="2200" dirty="0"/>
           </a:p>
@@ -11483,7 +11483,7 @@
                 <a:ea typeface="Calibri" pitchFamily="34" charset="-122"/>
                 <a:cs typeface="Calibri" pitchFamily="34" charset="-120"/>
               </a:rPr>
-              <a:t>Eva had asked the shop for more pay</a:t>
+              <a:t>Eva had been rude to Mrs Birling</a:t>
             </a:r>
             <a:endParaRPr lang="en-US" sz="2200" dirty="0"/>
           </a:p>

--- a/decks/englit-inspector/englit-inspector_ch3_sheila-and-gerald.pptx
+++ b/decks/englit-inspector/englit-inspector_ch3_sheila-and-gerald.pptx
@@ -129,30 +129,30 @@
   <p:extLst>
     <p:ext uri="{521415D9-36F7-43E2-AB2F-B90AF26B5E84}">
       <p14:sectionLst xmlns:p14="http://schemas.microsoft.com/office/powerpoint/2010/main">
-        <p14:section name="Opening" id="{aefd9287-f053-ee1e-daab-452c86026906}">
+        <p14:section name="Opening" id="{5bc3c5ef-a788-3081-4808-5b230632a5af}">
           <p14:sldIdLst>
             <p14:sldId id="256"/>
           </p14:sldIdLst>
         </p14:section>
-        <p14:section name="Gate" id="{8b6633b4-1448-eb5e-319b-1b1bbde69616}">
+        <p14:section name="Gate" id="{37b29751-4107-34a2-9299-24ae0d6564f8}">
           <p14:sldIdLst>
             <p14:sldId id="257"/>
             <p14:sldId id="258"/>
           </p14:sldIdLst>
         </p14:section>
-        <p14:section name="Pre-teach" id="{195038dc-a463-8695-5849-abec6766ba77}">
+        <p14:section name="Pre-teach" id="{785107a0-1fdb-d4c1-9ed9-afdec45cb6bf}">
           <p14:sldIdLst>
             <p14:sldId id="259"/>
             <p14:sldId id="260"/>
           </p14:sldIdLst>
         </p14:section>
-        <p14:section name="Read-along" id="{a0acaecf-918d-bb20-2560-a8c18909bf5d}">
+        <p14:section name="Read-along" id="{40f58c56-9b06-ee88-2846-5aca042b70fd}">
           <p14:sldIdLst>
             <p14:sldId id="261"/>
             <p14:sldId id="262"/>
           </p14:sldIdLst>
         </p14:section>
-        <p14:section name="Teach" id="{63617362-26d9-8cef-1568-841ac63ba6d0}">
+        <p14:section name="Teach" id="{34b6611e-8af3-95d7-ee56-cea68edba8f7}">
           <p14:sldIdLst>
             <p14:sldId id="263"/>
             <p14:sldId id="264"/>
@@ -160,7 +160,7 @@
             <p14:sldId id="266"/>
           </p14:sldIdLst>
         </p14:section>
-        <p14:section name="Routes" id="{d0d26796-5373-972c-40b8-180c686dd237}">
+        <p14:section name="Routes" id="{35deac8a-6a8e-7e7a-edfe-8e5a6c296140}">
           <p14:sldIdLst>
             <p14:sldId id="267"/>
             <p14:sldId id="268"/>
@@ -171,12 +171,12 @@
             <p14:sldId id="273"/>
           </p14:sldIdLst>
         </p14:section>
-        <p14:section name="Close" id="{6e980a77-c3c0-0337-668f-bd9c05374dd5}">
+        <p14:section name="Close" id="{f8f8384a-394e-ae7c-6181-6a921bba8cce}">
           <p14:sldIdLst>
             <p14:sldId id="274"/>
           </p14:sldIdLst>
         </p14:section>
-        <p14:section name="Answers" id="{6a13c5e5-e441-e826-5941-84c7ee417dbb}">
+        <p14:section name="Answers" id="{175a10b2-e7d2-cd1d-10dc-f56eb8bda104}">
           <p14:sldIdLst>
             <p14:sldId id="275"/>
             <p14:sldId id="276"/>
